--- a/dist/초3/영어/듣기와말하기/초3_영어_듣기와말하기_03_감사·사과·부탁.pptx
+++ b/dist/초3/영어/듣기와말하기/초3_영어_듣기와말하기_03_감사·사과·부탁.pptx
@@ -121,20 +121,20 @@
   <p:extLst>
     <p:ext uri="{521415D9-36F7-43E2-AB2F-B90AF26B5E84}">
       <p14:sectionLst xmlns:p14="http://schemas.microsoft.com/office/powerpoint/2010/main">
-        <p14:section name="도입" id="{89c7974b-253a-91ac-00e9-30870e48b835}">
+        <p14:section name="도입" id="{781998a6-ac7e-6235-e0b0-67b9f27600b4}">
           <p14:sldIdLst>
             <p14:sldId id="256"/>
             <p14:sldId id="257"/>
           </p14:sldIdLst>
         </p14:section>
-        <p14:section name="개념" id="{0a4eb1d5-298d-ed6c-271a-414ee9696888}">
+        <p14:section name="개념" id="{440bfc74-5bb2-8894-401f-d89a965b3928}">
           <p14:sldIdLst>
             <p14:sldId id="258"/>
             <p14:sldId id="259"/>
             <p14:sldId id="260"/>
           </p14:sldIdLst>
         </p14:section>
-        <p14:section name="연습" id="{98f93958-a903-a11b-1e77-825d0fa3cbb5}">
+        <p14:section name="연습" id="{a3a99974-a832-86a5-9814-53fc9b059d56}">
           <p14:sldIdLst>
             <p14:sldId id="261"/>
             <p14:sldId id="262"/>
@@ -143,19 +143,19 @@
             <p14:sldId id="265"/>
           </p14:sldIdLst>
         </p14:section>
-        <p14:section name="확인" id="{3c77fdd2-3fc6-6e8b-8a11-141f4f99ae52}">
+        <p14:section name="확인" id="{ac23b232-28ee-9865-9063-4f6afca3506c}">
           <p14:sldIdLst>
             <p14:sldId id="266"/>
             <p14:sldId id="267"/>
             <p14:sldId id="268"/>
           </p14:sldIdLst>
         </p14:section>
-        <p14:section name="정리" id="{5c893a02-44af-2a9b-12ac-da8a675bf3c7}">
+        <p14:section name="정리" id="{071ccb11-f564-2682-88c2-e21785cfb6f9}">
           <p14:sldIdLst>
             <p14:sldId id="269"/>
           </p14:sldIdLst>
         </p14:section>
-        <p14:section name="보충" id="{4be1bffe-2ce1-c101-74eb-f7ae7b16f24c}">
+        <p14:section name="보충" id="{7d32deb8-c5ba-e19e-1881-30ca4c632f61}">
           <p14:sldIdLst>
             <p14:sldId id="270"/>
           </p14:sldIdLst>

--- a/dist/초3/영어/듣기와말하기/초3_영어_듣기와말하기_03_감사·사과·부탁.pptx
+++ b/dist/초3/영어/듣기와말하기/초3_영어_듣기와말하기_03_감사·사과·부탁.pptx
@@ -121,20 +121,20 @@
   <p:extLst>
     <p:ext uri="{521415D9-36F7-43E2-AB2F-B90AF26B5E84}">
       <p14:sectionLst xmlns:p14="http://schemas.microsoft.com/office/powerpoint/2010/main">
-        <p14:section name="도입" id="{781998a6-ac7e-6235-e0b0-67b9f27600b4}">
+        <p14:section name="도입" id="{8158e8c9-1d65-20fe-1fc5-8ff21a22a309}">
           <p14:sldIdLst>
             <p14:sldId id="256"/>
             <p14:sldId id="257"/>
           </p14:sldIdLst>
         </p14:section>
-        <p14:section name="개념" id="{440bfc74-5bb2-8894-401f-d89a965b3928}">
+        <p14:section name="개념" id="{cff68638-8073-f1a5-ddd3-dee14bbd30cc}">
           <p14:sldIdLst>
             <p14:sldId id="258"/>
             <p14:sldId id="259"/>
             <p14:sldId id="260"/>
           </p14:sldIdLst>
         </p14:section>
-        <p14:section name="연습" id="{a3a99974-a832-86a5-9814-53fc9b059d56}">
+        <p14:section name="연습" id="{bb669b48-2375-3cb2-60e0-7eec017682c9}">
           <p14:sldIdLst>
             <p14:sldId id="261"/>
             <p14:sldId id="262"/>
@@ -143,19 +143,19 @@
             <p14:sldId id="265"/>
           </p14:sldIdLst>
         </p14:section>
-        <p14:section name="확인" id="{ac23b232-28ee-9865-9063-4f6afca3506c}">
+        <p14:section name="확인" id="{6efee404-09c4-dce2-176c-bff87c3a4337}">
           <p14:sldIdLst>
             <p14:sldId id="266"/>
             <p14:sldId id="267"/>
             <p14:sldId id="268"/>
           </p14:sldIdLst>
         </p14:section>
-        <p14:section name="정리" id="{071ccb11-f564-2682-88c2-e21785cfb6f9}">
+        <p14:section name="정리" id="{8cbd0203-7d8b-4883-3deb-aba558e3c05e}">
           <p14:sldIdLst>
             <p14:sldId id="269"/>
           </p14:sldIdLst>
         </p14:section>
-        <p14:section name="보충" id="{7d32deb8-c5ba-e19e-1881-30ca4c632f61}">
+        <p14:section name="보충" id="{77726fb3-f883-4a24-4a58-04df08c1833f}">
           <p14:sldIdLst>
             <p14:sldId id="270"/>
           </p14:sldIdLst>
